--- a/data/sample2.pptx
+++ b/data/sample2.pptx
@@ -40,7 +40,7 @@
       </p:grpSpPr>
       <p:sp>
         <p:nvSpPr>
-          <p:cNvPr id="23" name="PlaceHolder 1"/>
+          <p:cNvPr id="19" name="PlaceHolder 1"/>
           <p:cNvSpPr>
             <a:spLocks noGrp="1"/>
           </p:cNvSpPr>
@@ -66,8 +66,9 @@
             <a:noAutofit/>
           </a:bodyPr>
           <a:p>
-            <a:r>
-              <a:rPr b="0" lang="en-US" sz="1400" spc="-1" strike="noStrike">
+            <a:pPr algn="ctr"/>
+            <a:r>
+              <a:rPr b="0" lang="en-US" sz="4400" spc="-1" strike="noStrike">
                 <a:solidFill>
                   <a:srgbClr val="000000"/>
                 </a:solidFill>
@@ -75,7 +76,7 @@
               </a:rPr>
               <a:t>Click to move the slide</a:t>
             </a:r>
-            <a:endParaRPr b="0" lang="en-US" sz="1400" spc="-1" strike="noStrike">
+            <a:endParaRPr b="0" lang="en-US" sz="4400" spc="-1" strike="noStrike">
               <a:solidFill>
                 <a:srgbClr val="000000"/>
               </a:solidFill>
@@ -86,7 +87,7 @@
       </p:sp>
       <p:sp>
         <p:nvSpPr>
-          <p:cNvPr id="24" name="PlaceHolder 2"/>
+          <p:cNvPr id="20" name="PlaceHolder 2"/>
           <p:cNvSpPr>
             <a:spLocks noGrp="1"/>
           </p:cNvSpPr>
@@ -135,7 +136,7 @@
       </p:sp>
       <p:sp>
         <p:nvSpPr>
-          <p:cNvPr id="25" name="PlaceHolder 3"/>
+          <p:cNvPr id="21" name="PlaceHolder 3"/>
           <p:cNvSpPr>
             <a:spLocks noGrp="1"/>
           </p:cNvSpPr>
@@ -184,7 +185,7 @@
       </p:sp>
       <p:sp>
         <p:nvSpPr>
-          <p:cNvPr id="26" name="PlaceHolder 4"/>
+          <p:cNvPr id="22" name="PlaceHolder 4"/>
           <p:cNvSpPr>
             <a:spLocks noGrp="1"/>
           </p:cNvSpPr>
@@ -244,7 +245,7 @@
       </p:sp>
       <p:sp>
         <p:nvSpPr>
-          <p:cNvPr id="27" name="PlaceHolder 5"/>
+          <p:cNvPr id="23" name="PlaceHolder 5"/>
           <p:cNvSpPr>
             <a:spLocks noGrp="1"/>
           </p:cNvSpPr>
@@ -304,7 +305,7 @@
       </p:sp>
       <p:sp>
         <p:nvSpPr>
-          <p:cNvPr id="28" name="PlaceHolder 6"/>
+          <p:cNvPr id="24" name="PlaceHolder 6"/>
           <p:cNvSpPr>
             <a:spLocks noGrp="1"/>
           </p:cNvSpPr>
@@ -344,7 +345,7 @@
             <a:pPr indent="0" algn="r">
               <a:buNone/>
             </a:pPr>
-            <a:fld id="{57B9A22D-BE46-458E-BA75-16CEF6741004}" type="slidenum">
+            <a:fld id="{C0D87C98-C473-4447-B4EE-4AE70D4B60F1}" type="slidenum">
               <a:rPr b="0" lang="en-US" sz="1400" spc="-1" strike="noStrike">
                 <a:solidFill>
                   <a:srgbClr val="000000"/>
@@ -387,7 +388,7 @@
       </p:grpSpPr>
       <p:sp>
         <p:nvSpPr>
-          <p:cNvPr id="43" name="PlaceHolder 1"/>
+          <p:cNvPr id="39" name="PlaceHolder 1"/>
           <p:cNvSpPr>
             <a:spLocks noGrp="1"/>
           </p:cNvSpPr>
@@ -398,7 +399,7 @@
         <p:spPr>
           <a:xfrm>
             <a:off x="381240" y="685800"/>
-            <a:ext cx="6095520" cy="3428640"/>
+            <a:ext cx="6095160" cy="3428280"/>
           </a:xfrm>
           <a:prstGeom prst="rect">
             <a:avLst/>
@@ -410,7 +411,7 @@
       </p:sp>
       <p:sp>
         <p:nvSpPr>
-          <p:cNvPr id="44" name="PlaceHolder 2"/>
+          <p:cNvPr id="40" name="PlaceHolder 2"/>
           <p:cNvSpPr>
             <a:spLocks noGrp="1"/>
           </p:cNvSpPr>
@@ -421,7 +422,7 @@
         <p:spPr>
           <a:xfrm>
             <a:off x="685800" y="4343400"/>
-            <a:ext cx="5486040" cy="4114440"/>
+            <a:ext cx="5485680" cy="4114080"/>
           </a:xfrm>
           <a:prstGeom prst="rect">
             <a:avLst/>
@@ -436,7 +437,7 @@
             <a:noAutofit/>
           </a:bodyPr>
           <a:p>
-            <a:pPr indent="0">
+            <a:pPr marL="216000" indent="0">
               <a:lnSpc>
                 <a:spcPct val="100000"/>
               </a:lnSpc>
@@ -462,7 +463,7 @@
             </a:endParaRPr>
           </a:p>
           <a:p>
-            <a:pPr indent="0">
+            <a:pPr marL="216000" indent="0">
               <a:lnSpc>
                 <a:spcPct val="100000"/>
               </a:lnSpc>
@@ -478,7 +479,7 @@
                 </a:solidFill>
                 <a:latin typeface="Arial"/>
               </a:rPr>
-              <a:t>I want to tell you about VonSim, an educational simulator for learning Assembly. </a:t>
+              <a:t>I want to tell you about VonSim, an educational simulator for Assembly. </a:t>
             </a:r>
             <a:endParaRPr b="0" lang="en-US" sz="1100" spc="-1" strike="noStrike">
               <a:solidFill>
@@ -513,7 +514,7 @@
       </p:grpSpPr>
       <p:sp>
         <p:nvSpPr>
-          <p:cNvPr id="45" name="PlaceHolder 1"/>
+          <p:cNvPr id="41" name="PlaceHolder 1"/>
           <p:cNvSpPr>
             <a:spLocks noGrp="1"/>
           </p:cNvSpPr>
@@ -524,7 +525,7 @@
         <p:spPr>
           <a:xfrm>
             <a:off x="381240" y="685800"/>
-            <a:ext cx="6095520" cy="3428640"/>
+            <a:ext cx="6095160" cy="3428280"/>
           </a:xfrm>
           <a:prstGeom prst="rect">
             <a:avLst/>
@@ -536,7 +537,7 @@
       </p:sp>
       <p:sp>
         <p:nvSpPr>
-          <p:cNvPr id="46" name="PlaceHolder 2"/>
+          <p:cNvPr id="42" name="PlaceHolder 2"/>
           <p:cNvSpPr>
             <a:spLocks noGrp="1"/>
           </p:cNvSpPr>
@@ -547,7 +548,7 @@
         <p:spPr>
           <a:xfrm>
             <a:off x="685800" y="4343400"/>
-            <a:ext cx="5486040" cy="4114440"/>
+            <a:ext cx="5485680" cy="4114080"/>
           </a:xfrm>
           <a:prstGeom prst="rect">
             <a:avLst/>
@@ -562,7 +563,7 @@
             <a:noAutofit/>
           </a:bodyPr>
           <a:p>
-            <a:pPr indent="0">
+            <a:pPr marL="216000" indent="0">
               <a:lnSpc>
                 <a:spcPct val="100000"/>
               </a:lnSpc>
@@ -588,7 +589,7 @@
             </a:endParaRPr>
           </a:p>
           <a:p>
-            <a:pPr indent="0">
+            <a:pPr marL="216000" indent="0">
               <a:lnSpc>
                 <a:spcPct val="100000"/>
               </a:lnSpc>
@@ -614,7 +615,7 @@
             </a:endParaRPr>
           </a:p>
           <a:p>
-            <a:pPr indent="0">
+            <a:pPr marL="216000" indent="0">
               <a:lnSpc>
                 <a:spcPct val="100000"/>
               </a:lnSpc>
@@ -641,7 +642,7 @@
             </a:endParaRPr>
           </a:p>
           <a:p>
-            <a:pPr indent="0">
+            <a:pPr marL="216000" indent="0">
               <a:lnSpc>
                 <a:spcPct val="100000"/>
               </a:lnSpc>
@@ -656,8 +657,9 @@
                   <a:srgbClr val="000000"/>
                 </a:solidFill>
                 <a:latin typeface="Arial"/>
-              </a:rPr>
-              <a:t>VonSim is now 8 years old, and has had a very positive impact in the learning experience of our students.</a:t>
+                <a:ea typeface="Noto Sans CJK SC"/>
+              </a:rPr>
+              <a:t>VonSim is now 8 years old, and has had a very positive impact in the learning experience of students.</a:t>
             </a:r>
             <a:endParaRPr b="0" lang="en-US" sz="1100" spc="-1" strike="noStrike">
               <a:solidFill>
@@ -702,8 +704,8 @@
         </p:nvSpPr>
         <p:spPr>
           <a:xfrm>
-            <a:off x="159480" y="64080"/>
-            <a:ext cx="8520120" cy="572400"/>
+            <a:off x="159480" y="37440"/>
+            <a:ext cx="8519760" cy="625320"/>
           </a:xfrm>
           <a:prstGeom prst="rect">
             <a:avLst/>
@@ -718,12 +720,12 @@
             <a:noAutofit/>
           </a:bodyPr>
           <a:p>
-            <a:pPr indent="0">
+            <a:pPr indent="0" algn="ctr">
               <a:buNone/>
             </a:pPr>
-            <a:endParaRPr b="0" lang="en-US" sz="1400" spc="-1" strike="noStrike">
-              <a:solidFill>
-                <a:srgbClr val="000000"/>
+            <a:endParaRPr b="0" lang="en-US" sz="4400" spc="-1" strike="noStrike">
+              <a:solidFill>
+                <a:srgbClr val="ffffff"/>
               </a:solidFill>
               <a:latin typeface="Arial"/>
             </a:endParaRPr>
@@ -784,7 +786,7 @@
         <p:txBody>
           <a:bodyPr/>
           <a:p>
-            <a:fld id="{C903D14A-374F-468C-94BC-EF8EC7C43AB1}" type="slidenum">
+            <a:fld id="{043DF414-D1DB-493A-BBFF-24902663DA9F}" type="slidenum">
               <a:t>&lt;#&gt;</a:t>
             </a:fld>
           </a:p>
@@ -826,7 +828,7 @@
         <p:txBody>
           <a:bodyPr/>
           <a:p>
-            <a:fld id="{89060E9D-5594-4F7D-8F61-B126EB792BDE}" type="slidenum">
+            <a:fld id="{29B113FD-34E2-420D-AC51-5B8ECEEE65EA}" type="slidenum">
               <a:t>&lt;#&gt;</a:t>
             </a:fld>
           </a:p>
@@ -856,7 +858,7 @@
       </p:grpSpPr>
       <p:sp>
         <p:nvSpPr>
-          <p:cNvPr id="10" name="PlaceHolder 1"/>
+          <p:cNvPr id="9" name="PlaceHolder 1"/>
           <p:cNvSpPr>
             <a:spLocks noGrp="1"/>
           </p:cNvSpPr>
@@ -866,8 +868,8 @@
         </p:nvSpPr>
         <p:spPr>
           <a:xfrm>
-            <a:off x="159480" y="64080"/>
-            <a:ext cx="8520120" cy="572400"/>
+            <a:off x="159480" y="37440"/>
+            <a:ext cx="8519760" cy="625320"/>
           </a:xfrm>
           <a:prstGeom prst="rect">
             <a:avLst/>
@@ -882,12 +884,12 @@
             <a:noAutofit/>
           </a:bodyPr>
           <a:p>
-            <a:pPr indent="0">
+            <a:pPr indent="0" algn="ctr">
               <a:buNone/>
             </a:pPr>
-            <a:endParaRPr b="0" lang="en-US" sz="1400" spc="-1" strike="noStrike">
-              <a:solidFill>
-                <a:srgbClr val="000000"/>
+            <a:endParaRPr b="0" lang="en-US" sz="4400" spc="-1" strike="noStrike">
+              <a:solidFill>
+                <a:srgbClr val="ffffff"/>
               </a:solidFill>
               <a:latin typeface="Arial"/>
             </a:endParaRPr>
@@ -896,7 +898,7 @@
       </p:sp>
       <p:sp>
         <p:nvSpPr>
-          <p:cNvPr id="11" name="PlaceHolder 2"/>
+          <p:cNvPr id="10" name="PlaceHolder 2"/>
           <p:cNvSpPr>
             <a:spLocks noGrp="1"/>
           </p:cNvSpPr>
@@ -928,9 +930,9 @@
               </a:spcBef>
               <a:buNone/>
             </a:pPr>
-            <a:endParaRPr b="0" lang="en-US" sz="1400" spc="-1" strike="noStrike">
-              <a:solidFill>
-                <a:srgbClr val="000000"/>
+            <a:endParaRPr b="0" lang="en-US" sz="3200" spc="-1" strike="noStrike">
+              <a:solidFill>
+                <a:srgbClr val="ffffff"/>
               </a:solidFill>
               <a:latin typeface="Arial"/>
             </a:endParaRPr>
@@ -951,7 +953,7 @@
         <p:txBody>
           <a:bodyPr/>
           <a:p>
-            <a:fld id="{0780CCD7-3F90-4D7C-B55D-FC23F5D8EF1A}" type="slidenum">
+            <a:fld id="{8EE0E752-626A-4A69-8111-D9FB8E0BFC66}" type="slidenum">
               <a:t>&lt;#&gt;</a:t>
             </a:fld>
           </a:p>
@@ -981,7 +983,7 @@
       </p:grpSpPr>
       <p:sp>
         <p:nvSpPr>
-          <p:cNvPr id="15" name="PlaceHolder 1"/>
+          <p:cNvPr id="14" name="PlaceHolder 1"/>
           <p:cNvSpPr>
             <a:spLocks noGrp="1"/>
           </p:cNvSpPr>
@@ -991,8 +993,8 @@
         </p:nvSpPr>
         <p:spPr>
           <a:xfrm>
-            <a:off x="159480" y="64080"/>
-            <a:ext cx="8520120" cy="572400"/>
+            <a:off x="159480" y="37440"/>
+            <a:ext cx="8519760" cy="625320"/>
           </a:xfrm>
           <a:prstGeom prst="rect">
             <a:avLst/>
@@ -1007,12 +1009,12 @@
             <a:noAutofit/>
           </a:bodyPr>
           <a:p>
-            <a:pPr indent="0">
+            <a:pPr indent="0" algn="ctr">
               <a:buNone/>
             </a:pPr>
-            <a:endParaRPr b="0" lang="en-US" sz="1400" spc="-1" strike="noStrike">
-              <a:solidFill>
-                <a:srgbClr val="000000"/>
+            <a:endParaRPr b="0" lang="en-US" sz="4400" spc="-1" strike="noStrike">
+              <a:solidFill>
+                <a:srgbClr val="ffffff"/>
               </a:solidFill>
               <a:latin typeface="Arial"/>
             </a:endParaRPr>
@@ -1033,7 +1035,7 @@
         <p:txBody>
           <a:bodyPr/>
           <a:p>
-            <a:fld id="{426A92CE-C030-4225-B2DC-CE33716B583F}" type="slidenum">
+            <a:fld id="{B5509135-6A3F-4327-817A-B68F43AA9230}" type="slidenum">
               <a:t>&lt;#&gt;</a:t>
             </a:fld>
           </a:p>
@@ -1075,7 +1077,7 @@
         <p:txBody>
           <a:bodyPr/>
           <a:p>
-            <a:fld id="{0A77C822-10E1-4A07-9ACC-95BA6E7898DA}" type="slidenum">
+            <a:fld id="{7A61B8A4-4EBF-4FB7-9C47-AEE158FC4FAF}" type="slidenum">
               <a:t>&lt;#&gt;</a:t>
             </a:fld>
           </a:p>
@@ -1117,7 +1119,7 @@
         <p:txBody>
           <a:bodyPr/>
           <a:p>
-            <a:fld id="{7E266D3C-8AB5-444C-A708-8627E982A2B3}" type="slidenum">
+            <a:fld id="{C9F3599D-73AD-40E5-A6E3-085DFF53E448}" type="slidenum">
               <a:t>&lt;#&gt;</a:t>
             </a:fld>
           </a:p>
@@ -1164,8 +1166,8 @@
         </p:nvSpPr>
         <p:spPr>
           <a:xfrm>
-            <a:off x="671400" y="990720"/>
-            <a:ext cx="7801200" cy="1729800"/>
+            <a:off x="159480" y="64080"/>
+            <a:ext cx="8519760" cy="572040"/>
           </a:xfrm>
           <a:prstGeom prst="rect">
             <a:avLst/>
@@ -1176,25 +1178,25 @@
           </a:ln>
         </p:spPr>
         <p:txBody>
-          <a:bodyPr lIns="91440" rIns="91440" tIns="91440" bIns="91440" anchor="b">
-            <a:normAutofit/>
+          <a:bodyPr lIns="0" rIns="0" tIns="0" bIns="0" anchor="ctr">
+            <a:noAutofit/>
           </a:bodyPr>
           <a:p>
             <a:pPr indent="0">
               <a:buNone/>
             </a:pPr>
             <a:r>
-              <a:rPr b="0" lang="en-US" sz="4800" spc="-1" strike="noStrike">
-                <a:solidFill>
-                  <a:srgbClr val="000000"/>
+              <a:rPr b="0" lang="en-US" sz="1800" spc="-1" strike="noStrike">
+                <a:solidFill>
+                  <a:srgbClr val="ffffff"/>
                 </a:solidFill>
                 <a:latin typeface="Arial"/>
               </a:rPr>
               <a:t>Click to edit the title text format</a:t>
             </a:r>
-            <a:endParaRPr b="0" lang="en-US" sz="4800" spc="-1" strike="noStrike">
-              <a:solidFill>
-                <a:srgbClr val="000000"/>
+            <a:endParaRPr b="0" lang="en-US" sz="1800" spc="-1" strike="noStrike">
+              <a:solidFill>
+                <a:srgbClr val="ffffff"/>
               </a:solidFill>
               <a:latin typeface="Arial"/>
             </a:endParaRPr>
@@ -1214,7 +1216,7 @@
         <p:spPr>
           <a:xfrm>
             <a:off x="8490240" y="4681080"/>
-            <a:ext cx="548280" cy="393120"/>
+            <a:ext cx="547920" cy="392760"/>
           </a:xfrm>
           <a:prstGeom prst="rect">
             <a:avLst/>
@@ -1226,7 +1228,7 @@
         </p:spPr>
         <p:txBody>
           <a:bodyPr lIns="91440" rIns="91440" tIns="91440" bIns="91440" anchor="ctr">
-            <a:normAutofit/>
+            <a:noAutofit/>
           </a:bodyPr>
           <a:lstStyle>
             <a:lvl1pPr indent="0" algn="r">
@@ -1256,7 +1258,7 @@
                 <a:tab algn="l" pos="0"/>
               </a:tabLst>
             </a:pPr>
-            <a:fld id="{F7D6E3E2-CFBC-4461-B368-4716335F4B7D}" type="slidenum">
+            <a:fld id="{6E4BA19D-3A53-4B12-A1B0-3949A6D1B957}" type="slidenum">
               <a:rPr b="0" lang="en" sz="1000" spc="-1" strike="noStrike">
                 <a:solidFill>
                   <a:schemeClr val="accent3"/>
@@ -1315,17 +1317,17 @@
               <a:buChar char=""/>
             </a:pPr>
             <a:r>
-              <a:rPr b="0" lang="en-US" sz="1400" spc="-1" strike="noStrike">
-                <a:solidFill>
-                  <a:srgbClr val="000000"/>
+              <a:rPr b="0" lang="en-US" sz="3200" spc="-1" strike="noStrike">
+                <a:solidFill>
+                  <a:srgbClr val="ffffff"/>
                 </a:solidFill>
                 <a:latin typeface="Arial"/>
               </a:rPr>
               <a:t>Click to edit the outline text format</a:t>
             </a:r>
-            <a:endParaRPr b="0" lang="en-US" sz="1400" spc="-1" strike="noStrike">
-              <a:solidFill>
-                <a:srgbClr val="000000"/>
+            <a:endParaRPr b="0" lang="en-US" sz="3200" spc="-1" strike="noStrike">
+              <a:solidFill>
+                <a:srgbClr val="ffffff"/>
               </a:solidFill>
               <a:latin typeface="Arial"/>
             </a:endParaRPr>
@@ -1343,17 +1345,17 @@
               <a:buChar char=""/>
             </a:pPr>
             <a:r>
-              <a:rPr b="0" lang="en-US" sz="1400" spc="-1" strike="noStrike">
-                <a:solidFill>
-                  <a:srgbClr val="000000"/>
+              <a:rPr b="0" lang="en-US" sz="2800" spc="-1" strike="noStrike">
+                <a:solidFill>
+                  <a:srgbClr val="ffffff"/>
                 </a:solidFill>
                 <a:latin typeface="Arial"/>
               </a:rPr>
               <a:t>Second Outline Level</a:t>
             </a:r>
-            <a:endParaRPr b="0" lang="en-US" sz="1400" spc="-1" strike="noStrike">
-              <a:solidFill>
-                <a:srgbClr val="000000"/>
+            <a:endParaRPr b="0" lang="en-US" sz="2800" spc="-1" strike="noStrike">
+              <a:solidFill>
+                <a:srgbClr val="ffffff"/>
               </a:solidFill>
               <a:latin typeface="Arial"/>
             </a:endParaRPr>
@@ -1371,17 +1373,17 @@
               <a:buChar char=""/>
             </a:pPr>
             <a:r>
-              <a:rPr b="0" lang="en-US" sz="1400" spc="-1" strike="noStrike">
-                <a:solidFill>
-                  <a:srgbClr val="000000"/>
+              <a:rPr b="0" lang="en-US" sz="2400" spc="-1" strike="noStrike">
+                <a:solidFill>
+                  <a:srgbClr val="ffffff"/>
                 </a:solidFill>
                 <a:latin typeface="Arial"/>
               </a:rPr>
               <a:t>Third Outline Level</a:t>
             </a:r>
-            <a:endParaRPr b="0" lang="en-US" sz="1400" spc="-1" strike="noStrike">
-              <a:solidFill>
-                <a:srgbClr val="000000"/>
+            <a:endParaRPr b="0" lang="en-US" sz="2400" spc="-1" strike="noStrike">
+              <a:solidFill>
+                <a:srgbClr val="ffffff"/>
               </a:solidFill>
               <a:latin typeface="Arial"/>
             </a:endParaRPr>
@@ -1399,17 +1401,17 @@
               <a:buChar char=""/>
             </a:pPr>
             <a:r>
-              <a:rPr b="0" lang="en-US" sz="1400" spc="-1" strike="noStrike">
-                <a:solidFill>
-                  <a:srgbClr val="000000"/>
+              <a:rPr b="0" lang="en-US" sz="2000" spc="-1" strike="noStrike">
+                <a:solidFill>
+                  <a:srgbClr val="ffffff"/>
                 </a:solidFill>
                 <a:latin typeface="Arial"/>
               </a:rPr>
               <a:t>Fourth Outline Level</a:t>
             </a:r>
-            <a:endParaRPr b="0" lang="en-US" sz="1400" spc="-1" strike="noStrike">
-              <a:solidFill>
-                <a:srgbClr val="000000"/>
+            <a:endParaRPr b="0" lang="en-US" sz="2000" spc="-1" strike="noStrike">
+              <a:solidFill>
+                <a:srgbClr val="ffffff"/>
               </a:solidFill>
               <a:latin typeface="Arial"/>
             </a:endParaRPr>
@@ -1429,7 +1431,7 @@
             <a:r>
               <a:rPr b="0" lang="en-US" sz="2000" spc="-1" strike="noStrike">
                 <a:solidFill>
-                  <a:srgbClr val="000000"/>
+                  <a:srgbClr val="ffffff"/>
                 </a:solidFill>
                 <a:latin typeface="Arial"/>
               </a:rPr>
@@ -1437,7 +1439,7 @@
             </a:r>
             <a:endParaRPr b="0" lang="en-US" sz="2000" spc="-1" strike="noStrike">
               <a:solidFill>
-                <a:srgbClr val="000000"/>
+                <a:srgbClr val="ffffff"/>
               </a:solidFill>
               <a:latin typeface="Arial"/>
             </a:endParaRPr>
@@ -1457,7 +1459,7 @@
             <a:r>
               <a:rPr b="0" lang="en-US" sz="2000" spc="-1" strike="noStrike">
                 <a:solidFill>
-                  <a:srgbClr val="000000"/>
+                  <a:srgbClr val="ffffff"/>
                 </a:solidFill>
                 <a:latin typeface="Arial"/>
               </a:rPr>
@@ -1465,7 +1467,7 @@
             </a:r>
             <a:endParaRPr b="0" lang="en-US" sz="2000" spc="-1" strike="noStrike">
               <a:solidFill>
-                <a:srgbClr val="000000"/>
+                <a:srgbClr val="ffffff"/>
               </a:solidFill>
               <a:latin typeface="Arial"/>
             </a:endParaRPr>
@@ -1485,7 +1487,7 @@
             <a:r>
               <a:rPr b="0" lang="en-US" sz="2000" spc="-1" strike="noStrike">
                 <a:solidFill>
-                  <a:srgbClr val="000000"/>
+                  <a:srgbClr val="ffffff"/>
                 </a:solidFill>
                 <a:latin typeface="Arial"/>
               </a:rPr>
@@ -1493,7 +1495,7 @@
             </a:r>
             <a:endParaRPr b="0" lang="en-US" sz="2000" spc="-1" strike="noStrike">
               <a:solidFill>
-                <a:srgbClr val="000000"/>
+                <a:srgbClr val="ffffff"/>
               </a:solidFill>
               <a:latin typeface="Arial"/>
             </a:endParaRPr>
@@ -1540,13 +1542,13 @@
             <a:spLocks noGrp="1"/>
           </p:cNvSpPr>
           <p:nvPr>
-            <p:ph type="title"/>
+            <p:ph type="sldNum" idx="2"/>
           </p:nvPr>
         </p:nvSpPr>
         <p:spPr>
           <a:xfrm>
-            <a:off x="671400" y="2141280"/>
-            <a:ext cx="7851960" cy="860760"/>
+            <a:off x="8490240" y="4681080"/>
+            <a:ext cx="547920" cy="392760"/>
           </a:xfrm>
           <a:prstGeom prst="rect">
             <a:avLst/>
@@ -1558,56 +1560,7 @@
         </p:spPr>
         <p:txBody>
           <a:bodyPr lIns="91440" rIns="91440" tIns="91440" bIns="91440" anchor="ctr">
-            <a:normAutofit/>
-          </a:bodyPr>
-          <a:p>
-            <a:pPr indent="0">
-              <a:buNone/>
-            </a:pPr>
-            <a:r>
-              <a:rPr b="0" lang="en-US" sz="3600" spc="-1" strike="noStrike">
-                <a:solidFill>
-                  <a:srgbClr val="000000"/>
-                </a:solidFill>
-                <a:latin typeface="Arial"/>
-              </a:rPr>
-              <a:t>Click to edit the title text format</a:t>
-            </a:r>
-            <a:endParaRPr b="0" lang="en-US" sz="3600" spc="-1" strike="noStrike">
-              <a:solidFill>
-                <a:srgbClr val="000000"/>
-              </a:solidFill>
-              <a:latin typeface="Arial"/>
-            </a:endParaRPr>
-          </a:p>
-        </p:txBody>
-      </p:sp>
-      <p:sp>
-        <p:nvSpPr>
-          <p:cNvPr id="6" name="PlaceHolder 2"/>
-          <p:cNvSpPr>
-            <a:spLocks noGrp="1"/>
-          </p:cNvSpPr>
-          <p:nvPr>
-            <p:ph type="sldNum" idx="2"/>
-          </p:nvPr>
-        </p:nvSpPr>
-        <p:spPr>
-          <a:xfrm>
-            <a:off x="8490240" y="4681080"/>
-            <a:ext cx="548280" cy="393120"/>
-          </a:xfrm>
-          <a:prstGeom prst="rect">
-            <a:avLst/>
-          </a:prstGeom>
-          <a:noFill/>
-          <a:ln w="0">
-            <a:noFill/>
-          </a:ln>
-        </p:spPr>
-        <p:txBody>
-          <a:bodyPr lIns="91440" rIns="91440" tIns="91440" bIns="91440" anchor="ctr">
-            <a:normAutofit/>
+            <a:noAutofit/>
           </a:bodyPr>
           <a:lstStyle>
             <a:lvl1pPr indent="0" algn="r">
@@ -1637,7 +1590,7 @@
                 <a:tab algn="l" pos="0"/>
               </a:tabLst>
             </a:pPr>
-            <a:fld id="{3773BABB-9066-46F4-BDA3-C681E811DB57}" type="slidenum">
+            <a:fld id="{6656721C-064D-43B1-88CB-E067681B9B3B}" type="slidenum">
               <a:rPr b="0" lang="en" sz="1000" spc="-1" strike="noStrike">
                 <a:solidFill>
                   <a:schemeClr val="accent3"/>
@@ -1691,7 +1644,7 @@
       </p:grpSpPr>
       <p:sp>
         <p:nvSpPr>
-          <p:cNvPr id="7" name="PlaceHolder 1"/>
+          <p:cNvPr id="6" name="PlaceHolder 1"/>
           <p:cNvSpPr>
             <a:spLocks noGrp="1"/>
           </p:cNvSpPr>
@@ -1702,7 +1655,7 @@
         <p:spPr>
           <a:xfrm>
             <a:off x="159480" y="64080"/>
-            <a:ext cx="8520120" cy="572400"/>
+            <a:ext cx="8519760" cy="572040"/>
           </a:xfrm>
           <a:prstGeom prst="rect">
             <a:avLst/>
@@ -1713,25 +1666,25 @@
           </a:ln>
         </p:spPr>
         <p:txBody>
-          <a:bodyPr lIns="91440" rIns="91440" tIns="91440" bIns="91440" anchor="t">
-            <a:normAutofit fontScale="65255"/>
+          <a:bodyPr lIns="0" rIns="0" tIns="0" bIns="0" anchor="ctr">
+            <a:noAutofit/>
           </a:bodyPr>
           <a:p>
             <a:pPr indent="0">
               <a:buNone/>
             </a:pPr>
             <a:r>
-              <a:rPr b="0" lang="en-US" sz="4000" spc="-1" strike="noStrike">
-                <a:solidFill>
-                  <a:srgbClr val="000000"/>
+              <a:rPr b="0" lang="en-US" sz="1800" spc="-1" strike="noStrike">
+                <a:solidFill>
+                  <a:srgbClr val="ffffff"/>
                 </a:solidFill>
                 <a:latin typeface="Arial"/>
               </a:rPr>
               <a:t>Click to edit the title text format</a:t>
             </a:r>
-            <a:endParaRPr b="0" lang="en-US" sz="4000" spc="-1" strike="noStrike">
-              <a:solidFill>
-                <a:srgbClr val="000000"/>
+            <a:endParaRPr b="0" lang="en-US" sz="1800" spc="-1" strike="noStrike">
+              <a:solidFill>
+                <a:srgbClr val="ffffff"/>
               </a:solidFill>
               <a:latin typeface="Arial"/>
             </a:endParaRPr>
@@ -1740,7 +1693,7 @@
       </p:sp>
       <p:sp>
         <p:nvSpPr>
-          <p:cNvPr id="8" name="PlaceHolder 2"/>
+          <p:cNvPr id="7" name="PlaceHolder 2"/>
           <p:cNvSpPr>
             <a:spLocks noGrp="1"/>
           </p:cNvSpPr>
@@ -1750,8 +1703,8 @@
         </p:nvSpPr>
         <p:spPr>
           <a:xfrm>
-            <a:off x="311760" y="1152360"/>
-            <a:ext cx="8520120" cy="3416040"/>
+            <a:off x="457200" y="1203480"/>
+            <a:ext cx="8228880" cy="2982600"/>
           </a:xfrm>
           <a:prstGeom prst="rect">
             <a:avLst/>
@@ -1762,7 +1715,7 @@
           </a:ln>
         </p:spPr>
         <p:txBody>
-          <a:bodyPr lIns="91440" rIns="91440" tIns="91440" bIns="91440" anchor="t">
+          <a:bodyPr lIns="0" rIns="0" tIns="0" bIns="0" anchor="t">
             <a:normAutofit/>
           </a:bodyPr>
           <a:p>
@@ -1778,17 +1731,17 @@
               <a:buChar char=""/>
             </a:pPr>
             <a:r>
-              <a:rPr b="0" lang="en-US" sz="2400" spc="-1" strike="noStrike">
-                <a:solidFill>
-                  <a:srgbClr val="000000"/>
+              <a:rPr b="0" lang="en-US" sz="1800" spc="-1" strike="noStrike">
+                <a:solidFill>
+                  <a:srgbClr val="ffffff"/>
                 </a:solidFill>
                 <a:latin typeface="Arial"/>
               </a:rPr>
               <a:t>Click to edit the outline text format</a:t>
             </a:r>
-            <a:endParaRPr b="0" lang="en-US" sz="2400" spc="-1" strike="noStrike">
-              <a:solidFill>
-                <a:srgbClr val="000000"/>
+            <a:endParaRPr b="0" lang="en-US" sz="1800" spc="-1" strike="noStrike">
+              <a:solidFill>
+                <a:srgbClr val="ffffff"/>
               </a:solidFill>
               <a:latin typeface="Arial"/>
             </a:endParaRPr>
@@ -1806,17 +1759,17 @@
               <a:buChar char=""/>
             </a:pPr>
             <a:r>
-              <a:rPr b="0" lang="en-US" sz="2400" spc="-1" strike="noStrike">
-                <a:solidFill>
-                  <a:srgbClr val="000000"/>
+              <a:rPr b="0" lang="en-US" sz="1800" spc="-1" strike="noStrike">
+                <a:solidFill>
+                  <a:srgbClr val="ffffff"/>
                 </a:solidFill>
                 <a:latin typeface="Arial"/>
               </a:rPr>
               <a:t>Second Outline Level</a:t>
             </a:r>
-            <a:endParaRPr b="0" lang="en-US" sz="2400" spc="-1" strike="noStrike">
-              <a:solidFill>
-                <a:srgbClr val="000000"/>
+            <a:endParaRPr b="0" lang="en-US" sz="1800" spc="-1" strike="noStrike">
+              <a:solidFill>
+                <a:srgbClr val="ffffff"/>
               </a:solidFill>
               <a:latin typeface="Arial"/>
             </a:endParaRPr>
@@ -1834,17 +1787,17 @@
               <a:buChar char=""/>
             </a:pPr>
             <a:r>
-              <a:rPr b="0" lang="en-US" sz="2400" spc="-1" strike="noStrike">
-                <a:solidFill>
-                  <a:srgbClr val="000000"/>
+              <a:rPr b="0" lang="en-US" sz="1800" spc="-1" strike="noStrike">
+                <a:solidFill>
+                  <a:srgbClr val="ffffff"/>
                 </a:solidFill>
                 <a:latin typeface="Arial"/>
               </a:rPr>
               <a:t>Third Outline Level</a:t>
             </a:r>
-            <a:endParaRPr b="0" lang="en-US" sz="2400" spc="-1" strike="noStrike">
-              <a:solidFill>
-                <a:srgbClr val="000000"/>
+            <a:endParaRPr b="0" lang="en-US" sz="1800" spc="-1" strike="noStrike">
+              <a:solidFill>
+                <a:srgbClr val="ffffff"/>
               </a:solidFill>
               <a:latin typeface="Arial"/>
             </a:endParaRPr>
@@ -1862,17 +1815,17 @@
               <a:buChar char=""/>
             </a:pPr>
             <a:r>
-              <a:rPr b="0" lang="en-US" sz="2400" spc="-1" strike="noStrike">
-                <a:solidFill>
-                  <a:srgbClr val="000000"/>
+              <a:rPr b="0" lang="en-US" sz="1800" spc="-1" strike="noStrike">
+                <a:solidFill>
+                  <a:srgbClr val="ffffff"/>
                 </a:solidFill>
                 <a:latin typeface="Arial"/>
               </a:rPr>
               <a:t>Fourth Outline Level</a:t>
             </a:r>
-            <a:endParaRPr b="0" lang="en-US" sz="2400" spc="-1" strike="noStrike">
-              <a:solidFill>
-                <a:srgbClr val="000000"/>
+            <a:endParaRPr b="0" lang="en-US" sz="1800" spc="-1" strike="noStrike">
+              <a:solidFill>
+                <a:srgbClr val="ffffff"/>
               </a:solidFill>
               <a:latin typeface="Arial"/>
             </a:endParaRPr>
@@ -1890,17 +1843,17 @@
               <a:buChar char=""/>
             </a:pPr>
             <a:r>
-              <a:rPr b="0" lang="en-US" sz="2400" spc="-1" strike="noStrike">
-                <a:solidFill>
-                  <a:srgbClr val="000000"/>
+              <a:rPr b="0" lang="en-US" sz="1800" spc="-1" strike="noStrike">
+                <a:solidFill>
+                  <a:srgbClr val="ffffff"/>
                 </a:solidFill>
                 <a:latin typeface="Arial"/>
               </a:rPr>
               <a:t>Fifth Outline Level</a:t>
             </a:r>
-            <a:endParaRPr b="0" lang="en-US" sz="2400" spc="-1" strike="noStrike">
-              <a:solidFill>
-                <a:srgbClr val="000000"/>
+            <a:endParaRPr b="0" lang="en-US" sz="1800" spc="-1" strike="noStrike">
+              <a:solidFill>
+                <a:srgbClr val="ffffff"/>
               </a:solidFill>
               <a:latin typeface="Arial"/>
             </a:endParaRPr>
@@ -1918,17 +1871,17 @@
               <a:buChar char=""/>
             </a:pPr>
             <a:r>
-              <a:rPr b="0" lang="en-US" sz="2400" spc="-1" strike="noStrike">
-                <a:solidFill>
-                  <a:srgbClr val="000000"/>
+              <a:rPr b="0" lang="en-US" sz="1800" spc="-1" strike="noStrike">
+                <a:solidFill>
+                  <a:srgbClr val="ffffff"/>
                 </a:solidFill>
                 <a:latin typeface="Arial"/>
               </a:rPr>
               <a:t>Sixth Outline Level</a:t>
             </a:r>
-            <a:endParaRPr b="0" lang="en-US" sz="2400" spc="-1" strike="noStrike">
-              <a:solidFill>
-                <a:srgbClr val="000000"/>
+            <a:endParaRPr b="0" lang="en-US" sz="1800" spc="-1" strike="noStrike">
+              <a:solidFill>
+                <a:srgbClr val="ffffff"/>
               </a:solidFill>
               <a:latin typeface="Arial"/>
             </a:endParaRPr>
@@ -1946,17 +1899,17 @@
               <a:buChar char=""/>
             </a:pPr>
             <a:r>
-              <a:rPr b="0" lang="en-US" sz="2400" spc="-1" strike="noStrike">
-                <a:solidFill>
-                  <a:srgbClr val="000000"/>
+              <a:rPr b="0" lang="en-US" sz="1800" spc="-1" strike="noStrike">
+                <a:solidFill>
+                  <a:srgbClr val="ffffff"/>
                 </a:solidFill>
                 <a:latin typeface="Arial"/>
               </a:rPr>
               <a:t>Seventh Outline Level</a:t>
             </a:r>
-            <a:endParaRPr b="0" lang="en-US" sz="2400" spc="-1" strike="noStrike">
-              <a:solidFill>
-                <a:srgbClr val="000000"/>
+            <a:endParaRPr b="0" lang="en-US" sz="1800" spc="-1" strike="noStrike">
+              <a:solidFill>
+                <a:srgbClr val="ffffff"/>
               </a:solidFill>
               <a:latin typeface="Arial"/>
             </a:endParaRPr>
@@ -1965,7 +1918,7 @@
       </p:sp>
       <p:sp>
         <p:nvSpPr>
-          <p:cNvPr id="9" name="PlaceHolder 3"/>
+          <p:cNvPr id="8" name="PlaceHolder 3"/>
           <p:cNvSpPr>
             <a:spLocks noGrp="1"/>
           </p:cNvSpPr>
@@ -1976,7 +1929,7 @@
         <p:spPr>
           <a:xfrm>
             <a:off x="8490240" y="4681080"/>
-            <a:ext cx="548280" cy="393120"/>
+            <a:ext cx="547920" cy="392760"/>
           </a:xfrm>
           <a:prstGeom prst="rect">
             <a:avLst/>
@@ -1988,7 +1941,7 @@
         </p:spPr>
         <p:txBody>
           <a:bodyPr lIns="91440" rIns="91440" tIns="91440" bIns="91440" anchor="ctr">
-            <a:normAutofit/>
+            <a:noAutofit/>
           </a:bodyPr>
           <a:lstStyle>
             <a:lvl1pPr indent="0" algn="r">
@@ -2018,7 +1971,7 @@
                 <a:tab algn="l" pos="0"/>
               </a:tabLst>
             </a:pPr>
-            <a:fld id="{12AD2966-10D9-4928-BEC7-84BAA82D0B2B}" type="slidenum">
+            <a:fld id="{B2B119E6-591A-4CCC-920F-9E32BD3CEAE6}" type="slidenum">
               <a:rPr b="0" lang="en" sz="1000" spc="-1" strike="noStrike">
                 <a:solidFill>
                   <a:schemeClr val="accent3"/>
@@ -2072,7 +2025,7 @@
       </p:grpSpPr>
       <p:sp>
         <p:nvSpPr>
-          <p:cNvPr id="12" name="PlaceHolder 1"/>
+          <p:cNvPr id="11" name="PlaceHolder 1"/>
           <p:cNvSpPr>
             <a:spLocks noGrp="1"/>
           </p:cNvSpPr>
@@ -2083,7 +2036,7 @@
         <p:spPr>
           <a:xfrm>
             <a:off x="159480" y="64080"/>
-            <a:ext cx="8520120" cy="572400"/>
+            <a:ext cx="8519760" cy="572040"/>
           </a:xfrm>
           <a:prstGeom prst="rect">
             <a:avLst/>
@@ -2094,25 +2047,25 @@
           </a:ln>
         </p:spPr>
         <p:txBody>
-          <a:bodyPr lIns="91440" rIns="91440" tIns="91440" bIns="91440" anchor="t">
-            <a:normAutofit fontScale="65255"/>
+          <a:bodyPr lIns="0" rIns="0" tIns="0" bIns="0" anchor="ctr">
+            <a:noAutofit/>
           </a:bodyPr>
           <a:p>
             <a:pPr indent="0">
               <a:buNone/>
             </a:pPr>
             <a:r>
-              <a:rPr b="0" lang="en-US" sz="4000" spc="-1" strike="noStrike">
-                <a:solidFill>
-                  <a:srgbClr val="000000"/>
+              <a:rPr b="0" lang="en-US" sz="1800" spc="-1" strike="noStrike">
+                <a:solidFill>
+                  <a:srgbClr val="ffffff"/>
                 </a:solidFill>
                 <a:latin typeface="Arial"/>
               </a:rPr>
               <a:t>Click to edit the title text format</a:t>
             </a:r>
-            <a:endParaRPr b="0" lang="en-US" sz="4000" spc="-1" strike="noStrike">
-              <a:solidFill>
-                <a:srgbClr val="000000"/>
+            <a:endParaRPr b="0" lang="en-US" sz="1800" spc="-1" strike="noStrike">
+              <a:solidFill>
+                <a:srgbClr val="ffffff"/>
               </a:solidFill>
               <a:latin typeface="Arial"/>
             </a:endParaRPr>
@@ -2121,7 +2074,7 @@
       </p:sp>
       <p:sp>
         <p:nvSpPr>
-          <p:cNvPr id="13" name="PlaceHolder 2"/>
+          <p:cNvPr id="12" name="PlaceHolder 2"/>
           <p:cNvSpPr>
             <a:spLocks noGrp="1"/>
           </p:cNvSpPr>
@@ -2132,7 +2085,7 @@
         <p:spPr>
           <a:xfrm>
             <a:off x="8490240" y="4681080"/>
-            <a:ext cx="548280" cy="393120"/>
+            <a:ext cx="547920" cy="392760"/>
           </a:xfrm>
           <a:prstGeom prst="rect">
             <a:avLst/>
@@ -2144,7 +2097,7 @@
         </p:spPr>
         <p:txBody>
           <a:bodyPr lIns="91440" rIns="91440" tIns="91440" bIns="91440" anchor="ctr">
-            <a:normAutofit/>
+            <a:noAutofit/>
           </a:bodyPr>
           <a:lstStyle>
             <a:lvl1pPr indent="0" algn="r">
@@ -2174,7 +2127,7 @@
                 <a:tab algn="l" pos="0"/>
               </a:tabLst>
             </a:pPr>
-            <a:fld id="{D9BBEBAA-83EA-4B8C-ACF1-3F5301874EED}" type="slidenum">
+            <a:fld id="{18296787-31B6-47FB-9141-44EC06F9725F}" type="slidenum">
               <a:rPr b="0" lang="en" sz="1000" spc="-1" strike="noStrike">
                 <a:solidFill>
                   <a:schemeClr val="accent3"/>
@@ -2195,7 +2148,7 @@
       </p:sp>
       <p:sp>
         <p:nvSpPr>
-          <p:cNvPr id="14" name="PlaceHolder 3"/>
+          <p:cNvPr id="13" name="PlaceHolder 3"/>
           <p:cNvSpPr>
             <a:spLocks noGrp="1"/>
           </p:cNvSpPr>
@@ -2233,17 +2186,17 @@
               <a:buChar char=""/>
             </a:pPr>
             <a:r>
-              <a:rPr b="0" lang="en-US" sz="1400" spc="-1" strike="noStrike">
-                <a:solidFill>
-                  <a:srgbClr val="000000"/>
+              <a:rPr b="0" lang="en-US" sz="3200" spc="-1" strike="noStrike">
+                <a:solidFill>
+                  <a:srgbClr val="ffffff"/>
                 </a:solidFill>
                 <a:latin typeface="Arial"/>
               </a:rPr>
               <a:t>Click to edit the outline text format</a:t>
             </a:r>
-            <a:endParaRPr b="0" lang="en-US" sz="1400" spc="-1" strike="noStrike">
-              <a:solidFill>
-                <a:srgbClr val="000000"/>
+            <a:endParaRPr b="0" lang="en-US" sz="3200" spc="-1" strike="noStrike">
+              <a:solidFill>
+                <a:srgbClr val="ffffff"/>
               </a:solidFill>
               <a:latin typeface="Arial"/>
             </a:endParaRPr>
@@ -2261,17 +2214,17 @@
               <a:buChar char=""/>
             </a:pPr>
             <a:r>
-              <a:rPr b="0" lang="en-US" sz="1400" spc="-1" strike="noStrike">
-                <a:solidFill>
-                  <a:srgbClr val="000000"/>
+              <a:rPr b="0" lang="en-US" sz="2800" spc="-1" strike="noStrike">
+                <a:solidFill>
+                  <a:srgbClr val="ffffff"/>
                 </a:solidFill>
                 <a:latin typeface="Arial"/>
               </a:rPr>
               <a:t>Second Outline Level</a:t>
             </a:r>
-            <a:endParaRPr b="0" lang="en-US" sz="1400" spc="-1" strike="noStrike">
-              <a:solidFill>
-                <a:srgbClr val="000000"/>
+            <a:endParaRPr b="0" lang="en-US" sz="2800" spc="-1" strike="noStrike">
+              <a:solidFill>
+                <a:srgbClr val="ffffff"/>
               </a:solidFill>
               <a:latin typeface="Arial"/>
             </a:endParaRPr>
@@ -2289,17 +2242,17 @@
               <a:buChar char=""/>
             </a:pPr>
             <a:r>
-              <a:rPr b="0" lang="en-US" sz="1400" spc="-1" strike="noStrike">
-                <a:solidFill>
-                  <a:srgbClr val="000000"/>
+              <a:rPr b="0" lang="en-US" sz="2400" spc="-1" strike="noStrike">
+                <a:solidFill>
+                  <a:srgbClr val="ffffff"/>
                 </a:solidFill>
                 <a:latin typeface="Arial"/>
               </a:rPr>
               <a:t>Third Outline Level</a:t>
             </a:r>
-            <a:endParaRPr b="0" lang="en-US" sz="1400" spc="-1" strike="noStrike">
-              <a:solidFill>
-                <a:srgbClr val="000000"/>
+            <a:endParaRPr b="0" lang="en-US" sz="2400" spc="-1" strike="noStrike">
+              <a:solidFill>
+                <a:srgbClr val="ffffff"/>
               </a:solidFill>
               <a:latin typeface="Arial"/>
             </a:endParaRPr>
@@ -2317,17 +2270,17 @@
               <a:buChar char=""/>
             </a:pPr>
             <a:r>
-              <a:rPr b="0" lang="en-US" sz="1400" spc="-1" strike="noStrike">
-                <a:solidFill>
-                  <a:srgbClr val="000000"/>
+              <a:rPr b="0" lang="en-US" sz="2000" spc="-1" strike="noStrike">
+                <a:solidFill>
+                  <a:srgbClr val="ffffff"/>
                 </a:solidFill>
                 <a:latin typeface="Arial"/>
               </a:rPr>
               <a:t>Fourth Outline Level</a:t>
             </a:r>
-            <a:endParaRPr b="0" lang="en-US" sz="1400" spc="-1" strike="noStrike">
-              <a:solidFill>
-                <a:srgbClr val="000000"/>
+            <a:endParaRPr b="0" lang="en-US" sz="2000" spc="-1" strike="noStrike">
+              <a:solidFill>
+                <a:srgbClr val="ffffff"/>
               </a:solidFill>
               <a:latin typeface="Arial"/>
             </a:endParaRPr>
@@ -2347,7 +2300,7 @@
             <a:r>
               <a:rPr b="0" lang="en-US" sz="2000" spc="-1" strike="noStrike">
                 <a:solidFill>
-                  <a:srgbClr val="000000"/>
+                  <a:srgbClr val="ffffff"/>
                 </a:solidFill>
                 <a:latin typeface="Arial"/>
               </a:rPr>
@@ -2355,7 +2308,7 @@
             </a:r>
             <a:endParaRPr b="0" lang="en-US" sz="2000" spc="-1" strike="noStrike">
               <a:solidFill>
-                <a:srgbClr val="000000"/>
+                <a:srgbClr val="ffffff"/>
               </a:solidFill>
               <a:latin typeface="Arial"/>
             </a:endParaRPr>
@@ -2375,7 +2328,7 @@
             <a:r>
               <a:rPr b="0" lang="en-US" sz="2000" spc="-1" strike="noStrike">
                 <a:solidFill>
-                  <a:srgbClr val="000000"/>
+                  <a:srgbClr val="ffffff"/>
                 </a:solidFill>
                 <a:latin typeface="Arial"/>
               </a:rPr>
@@ -2383,7 +2336,7 @@
             </a:r>
             <a:endParaRPr b="0" lang="en-US" sz="2000" spc="-1" strike="noStrike">
               <a:solidFill>
-                <a:srgbClr val="000000"/>
+                <a:srgbClr val="ffffff"/>
               </a:solidFill>
               <a:latin typeface="Arial"/>
             </a:endParaRPr>
@@ -2403,7 +2356,7 @@
             <a:r>
               <a:rPr b="0" lang="en-US" sz="2000" spc="-1" strike="noStrike">
                 <a:solidFill>
-                  <a:srgbClr val="000000"/>
+                  <a:srgbClr val="ffffff"/>
                 </a:solidFill>
                 <a:latin typeface="Arial"/>
               </a:rPr>
@@ -2411,7 +2364,7 @@
             </a:r>
             <a:endParaRPr b="0" lang="en-US" sz="2000" spc="-1" strike="noStrike">
               <a:solidFill>
-                <a:srgbClr val="000000"/>
+                <a:srgbClr val="ffffff"/>
               </a:solidFill>
               <a:latin typeface="Arial"/>
             </a:endParaRPr>
@@ -2453,18 +2406,18 @@
       </p:grpSpPr>
       <p:sp>
         <p:nvSpPr>
-          <p:cNvPr id="16" name="PlaceHolder 1"/>
+          <p:cNvPr id="15" name="PlaceHolder 1"/>
           <p:cNvSpPr>
             <a:spLocks noGrp="1"/>
           </p:cNvSpPr>
           <p:nvPr>
-            <p:ph type="title"/>
+            <p:ph type="sldNum" idx="5"/>
           </p:nvPr>
         </p:nvSpPr>
         <p:spPr>
           <a:xfrm>
-            <a:off x="490320" y="526320"/>
-            <a:ext cx="6226920" cy="4090320"/>
+            <a:off x="8490240" y="4681080"/>
+            <a:ext cx="547920" cy="392760"/>
           </a:xfrm>
           <a:prstGeom prst="rect">
             <a:avLst/>
@@ -2476,56 +2429,7 @@
         </p:spPr>
         <p:txBody>
           <a:bodyPr lIns="91440" rIns="91440" tIns="91440" bIns="91440" anchor="ctr">
-            <a:normAutofit/>
-          </a:bodyPr>
-          <a:p>
-            <a:pPr indent="0">
-              <a:buNone/>
-            </a:pPr>
-            <a:r>
-              <a:rPr b="0" lang="en-US" sz="4800" spc="-1" strike="noStrike">
-                <a:solidFill>
-                  <a:srgbClr val="000000"/>
-                </a:solidFill>
-                <a:latin typeface="Arial"/>
-              </a:rPr>
-              <a:t>Click to edit the title text format</a:t>
-            </a:r>
-            <a:endParaRPr b="0" lang="en-US" sz="4800" spc="-1" strike="noStrike">
-              <a:solidFill>
-                <a:srgbClr val="000000"/>
-              </a:solidFill>
-              <a:latin typeface="Arial"/>
-            </a:endParaRPr>
-          </a:p>
-        </p:txBody>
-      </p:sp>
-      <p:sp>
-        <p:nvSpPr>
-          <p:cNvPr id="17" name="PlaceHolder 2"/>
-          <p:cNvSpPr>
-            <a:spLocks noGrp="1"/>
-          </p:cNvSpPr>
-          <p:nvPr>
-            <p:ph type="sldNum" idx="5"/>
-          </p:nvPr>
-        </p:nvSpPr>
-        <p:spPr>
-          <a:xfrm>
-            <a:off x="8490240" y="4681080"/>
-            <a:ext cx="548280" cy="393120"/>
-          </a:xfrm>
-          <a:prstGeom prst="rect">
-            <a:avLst/>
-          </a:prstGeom>
-          <a:noFill/>
-          <a:ln w="0">
-            <a:noFill/>
-          </a:ln>
-        </p:spPr>
-        <p:txBody>
-          <a:bodyPr lIns="91440" rIns="91440" tIns="91440" bIns="91440" anchor="ctr">
-            <a:normAutofit/>
+            <a:noAutofit/>
           </a:bodyPr>
           <a:lstStyle>
             <a:lvl1pPr indent="0" algn="r">
@@ -2555,7 +2459,7 @@
                 <a:tab algn="l" pos="0"/>
               </a:tabLst>
             </a:pPr>
-            <a:fld id="{9A79EDFA-69E9-4EA3-8D8F-47E2A37DFAE4}" type="slidenum">
+            <a:fld id="{1EA32A0A-A92C-4C37-8031-25C5BC2B6F45}" type="slidenum">
               <a:rPr b="0" lang="en" sz="1000" spc="-1" strike="noStrike">
                 <a:solidFill>
                   <a:schemeClr val="lt1"/>
@@ -2609,14 +2513,14 @@
       </p:grpSpPr>
       <p:sp>
         <p:nvSpPr>
-          <p:cNvPr id="18" name="Google Shape;27;p7"/>
+          <p:cNvPr id="16" name="Google Shape;27;p7"/>
           <p:cNvSpPr/>
           <p:nvPr/>
         </p:nvSpPr>
         <p:spPr>
           <a:xfrm>
             <a:off x="4572000" y="0"/>
-            <a:ext cx="4571640" cy="5143320"/>
+            <a:ext cx="4571280" cy="5142960"/>
           </a:xfrm>
           <a:prstGeom prst="rect">
             <a:avLst/>
@@ -2635,7 +2539,7 @@
           <a:fontRef idx="minor"/>
         </p:style>
         <p:txBody>
-          <a:bodyPr tIns="91440" bIns="91440" anchor="ctr">
+          <a:bodyPr lIns="90000" rIns="90000" tIns="91440" bIns="91440" anchor="ctr">
             <a:noAutofit/>
           </a:bodyPr>
           <a:p>
@@ -2658,14 +2562,14 @@
       </p:sp>
       <p:cxnSp>
         <p:nvCxnSpPr>
-          <p:cNvPr id="19" name="Google Shape;28;p7"/>
+          <p:cNvPr id="17" name="Google Shape;28;p7"/>
           <p:cNvCxnSpPr/>
           <p:nvPr/>
         </p:nvCxnSpPr>
         <p:spPr>
           <a:xfrm>
             <a:off x="5029560" y="4495320"/>
-            <a:ext cx="468720" cy="360"/>
+            <a:ext cx="469080" cy="720"/>
           </a:xfrm>
           <a:prstGeom prst="straightConnector1">
             <a:avLst/>
@@ -2680,67 +2584,18 @@
       </p:cxnSp>
       <p:sp>
         <p:nvSpPr>
-          <p:cNvPr id="20" name="PlaceHolder 1"/>
+          <p:cNvPr id="18" name="PlaceHolder 1"/>
           <p:cNvSpPr>
             <a:spLocks noGrp="1"/>
           </p:cNvSpPr>
           <p:nvPr>
-            <p:ph type="title"/>
+            <p:ph type="sldNum" idx="6"/>
           </p:nvPr>
         </p:nvSpPr>
         <p:spPr>
           <a:xfrm>
-            <a:off x="265680" y="1081440"/>
-            <a:ext cx="4044960" cy="1710000"/>
-          </a:xfrm>
-          <a:prstGeom prst="rect">
-            <a:avLst/>
-          </a:prstGeom>
-          <a:noFill/>
-          <a:ln w="0">
-            <a:noFill/>
-          </a:ln>
-        </p:spPr>
-        <p:txBody>
-          <a:bodyPr lIns="91440" rIns="91440" tIns="91440" bIns="91440" anchor="b">
-            <a:normAutofit/>
-          </a:bodyPr>
-          <a:p>
-            <a:pPr indent="0">
-              <a:buNone/>
-            </a:pPr>
-            <a:r>
-              <a:rPr b="0" lang="en-US" sz="4200" spc="-1" strike="noStrike">
-                <a:solidFill>
-                  <a:srgbClr val="000000"/>
-                </a:solidFill>
-                <a:latin typeface="Arial"/>
-              </a:rPr>
-              <a:t>Click to edit the title text format</a:t>
-            </a:r>
-            <a:endParaRPr b="0" lang="en-US" sz="4200" spc="-1" strike="noStrike">
-              <a:solidFill>
-                <a:srgbClr val="000000"/>
-              </a:solidFill>
-              <a:latin typeface="Arial"/>
-            </a:endParaRPr>
-          </a:p>
-        </p:txBody>
-      </p:sp>
-      <p:sp>
-        <p:nvSpPr>
-          <p:cNvPr id="21" name="PlaceHolder 2"/>
-          <p:cNvSpPr>
-            <a:spLocks noGrp="1"/>
-          </p:cNvSpPr>
-          <p:nvPr>
-            <p:ph type="body"/>
-          </p:nvPr>
-        </p:nvSpPr>
-        <p:spPr>
-          <a:xfrm>
-            <a:off x="4939560" y="724320"/>
-            <a:ext cx="3836520" cy="3694680"/>
+            <a:off x="8490240" y="4681080"/>
+            <a:ext cx="547920" cy="392760"/>
           </a:xfrm>
           <a:prstGeom prst="rect">
             <a:avLst/>
@@ -2752,232 +2607,7 @@
         </p:spPr>
         <p:txBody>
           <a:bodyPr lIns="91440" rIns="91440" tIns="91440" bIns="91440" anchor="ctr">
-            <a:normAutofit fontScale="68306" lnSpcReduction="10000"/>
-          </a:bodyPr>
-          <a:p>
-            <a:pPr marL="432000" indent="-324000">
-              <a:spcBef>
-                <a:spcPts val="1417"/>
-              </a:spcBef>
-              <a:buClr>
-                <a:srgbClr val="ffffff"/>
-              </a:buClr>
-              <a:buSzPct val="45000"/>
-              <a:buFont typeface="Wingdings" charset="2"/>
-              <a:buChar char=""/>
-            </a:pPr>
-            <a:r>
-              <a:rPr b="0" lang="en-US" sz="2400" spc="-1" strike="noStrike">
-                <a:solidFill>
-                  <a:srgbClr val="000000"/>
-                </a:solidFill>
-                <a:latin typeface="Arial"/>
-              </a:rPr>
-              <a:t>Click to edit the outline text format</a:t>
-            </a:r>
-            <a:endParaRPr b="0" lang="en-US" sz="2400" spc="-1" strike="noStrike">
-              <a:solidFill>
-                <a:srgbClr val="000000"/>
-              </a:solidFill>
-              <a:latin typeface="Arial"/>
-            </a:endParaRPr>
-          </a:p>
-          <a:p>
-            <a:pPr lvl="1" marL="864000" indent="-324000">
-              <a:spcBef>
-                <a:spcPts val="1134"/>
-              </a:spcBef>
-              <a:buClr>
-                <a:srgbClr val="ffffff"/>
-              </a:buClr>
-              <a:buSzPct val="75000"/>
-              <a:buFont typeface="Symbol" charset="2"/>
-              <a:buChar char=""/>
-            </a:pPr>
-            <a:r>
-              <a:rPr b="0" lang="en-US" sz="2400" spc="-1" strike="noStrike">
-                <a:solidFill>
-                  <a:srgbClr val="000000"/>
-                </a:solidFill>
-                <a:latin typeface="Arial"/>
-              </a:rPr>
-              <a:t>Second Outline Level</a:t>
-            </a:r>
-            <a:endParaRPr b="0" lang="en-US" sz="2400" spc="-1" strike="noStrike">
-              <a:solidFill>
-                <a:srgbClr val="000000"/>
-              </a:solidFill>
-              <a:latin typeface="Arial"/>
-            </a:endParaRPr>
-          </a:p>
-          <a:p>
-            <a:pPr lvl="2" marL="1296000" indent="-288000">
-              <a:spcBef>
-                <a:spcPts val="850"/>
-              </a:spcBef>
-              <a:buClr>
-                <a:srgbClr val="ffffff"/>
-              </a:buClr>
-              <a:buSzPct val="45000"/>
-              <a:buFont typeface="Wingdings" charset="2"/>
-              <a:buChar char=""/>
-            </a:pPr>
-            <a:r>
-              <a:rPr b="0" lang="en-US" sz="2400" spc="-1" strike="noStrike">
-                <a:solidFill>
-                  <a:srgbClr val="000000"/>
-                </a:solidFill>
-                <a:latin typeface="Arial"/>
-              </a:rPr>
-              <a:t>Third Outline Level</a:t>
-            </a:r>
-            <a:endParaRPr b="0" lang="en-US" sz="2400" spc="-1" strike="noStrike">
-              <a:solidFill>
-                <a:srgbClr val="000000"/>
-              </a:solidFill>
-              <a:latin typeface="Arial"/>
-            </a:endParaRPr>
-          </a:p>
-          <a:p>
-            <a:pPr lvl="3" marL="1728000" indent="-216000">
-              <a:spcBef>
-                <a:spcPts val="567"/>
-              </a:spcBef>
-              <a:buClr>
-                <a:srgbClr val="ffffff"/>
-              </a:buClr>
-              <a:buSzPct val="75000"/>
-              <a:buFont typeface="Symbol" charset="2"/>
-              <a:buChar char=""/>
-            </a:pPr>
-            <a:r>
-              <a:rPr b="0" lang="en-US" sz="2400" spc="-1" strike="noStrike">
-                <a:solidFill>
-                  <a:srgbClr val="000000"/>
-                </a:solidFill>
-                <a:latin typeface="Arial"/>
-              </a:rPr>
-              <a:t>Fourth Outline Level</a:t>
-            </a:r>
-            <a:endParaRPr b="0" lang="en-US" sz="2400" spc="-1" strike="noStrike">
-              <a:solidFill>
-                <a:srgbClr val="000000"/>
-              </a:solidFill>
-              <a:latin typeface="Arial"/>
-            </a:endParaRPr>
-          </a:p>
-          <a:p>
-            <a:pPr lvl="4" marL="2160000" indent="-216000">
-              <a:spcBef>
-                <a:spcPts val="283"/>
-              </a:spcBef>
-              <a:buClr>
-                <a:srgbClr val="ffffff"/>
-              </a:buClr>
-              <a:buSzPct val="45000"/>
-              <a:buFont typeface="Wingdings" charset="2"/>
-              <a:buChar char=""/>
-            </a:pPr>
-            <a:r>
-              <a:rPr b="0" lang="en-US" sz="2400" spc="-1" strike="noStrike">
-                <a:solidFill>
-                  <a:srgbClr val="000000"/>
-                </a:solidFill>
-                <a:latin typeface="Arial"/>
-              </a:rPr>
-              <a:t>Fifth Outline Level</a:t>
-            </a:r>
-            <a:endParaRPr b="0" lang="en-US" sz="2400" spc="-1" strike="noStrike">
-              <a:solidFill>
-                <a:srgbClr val="000000"/>
-              </a:solidFill>
-              <a:latin typeface="Arial"/>
-            </a:endParaRPr>
-          </a:p>
-          <a:p>
-            <a:pPr lvl="5" marL="2592000" indent="-216000">
-              <a:spcBef>
-                <a:spcPts val="283"/>
-              </a:spcBef>
-              <a:buClr>
-                <a:srgbClr val="ffffff"/>
-              </a:buClr>
-              <a:buSzPct val="45000"/>
-              <a:buFont typeface="Wingdings" charset="2"/>
-              <a:buChar char=""/>
-            </a:pPr>
-            <a:r>
-              <a:rPr b="0" lang="en-US" sz="2400" spc="-1" strike="noStrike">
-                <a:solidFill>
-                  <a:srgbClr val="000000"/>
-                </a:solidFill>
-                <a:latin typeface="Arial"/>
-              </a:rPr>
-              <a:t>Sixth Outline Level</a:t>
-            </a:r>
-            <a:endParaRPr b="0" lang="en-US" sz="2400" spc="-1" strike="noStrike">
-              <a:solidFill>
-                <a:srgbClr val="000000"/>
-              </a:solidFill>
-              <a:latin typeface="Arial"/>
-            </a:endParaRPr>
-          </a:p>
-          <a:p>
-            <a:pPr lvl="6" marL="3024000" indent="-216000">
-              <a:spcBef>
-                <a:spcPts val="283"/>
-              </a:spcBef>
-              <a:buClr>
-                <a:srgbClr val="ffffff"/>
-              </a:buClr>
-              <a:buSzPct val="45000"/>
-              <a:buFont typeface="Wingdings" charset="2"/>
-              <a:buChar char=""/>
-            </a:pPr>
-            <a:r>
-              <a:rPr b="0" lang="en-US" sz="2400" spc="-1" strike="noStrike">
-                <a:solidFill>
-                  <a:srgbClr val="000000"/>
-                </a:solidFill>
-                <a:latin typeface="Arial"/>
-              </a:rPr>
-              <a:t>Seventh Outline Level</a:t>
-            </a:r>
-            <a:endParaRPr b="0" lang="en-US" sz="2400" spc="-1" strike="noStrike">
-              <a:solidFill>
-                <a:srgbClr val="000000"/>
-              </a:solidFill>
-              <a:latin typeface="Arial"/>
-            </a:endParaRPr>
-          </a:p>
-        </p:txBody>
-      </p:sp>
-      <p:sp>
-        <p:nvSpPr>
-          <p:cNvPr id="22" name="PlaceHolder 3"/>
-          <p:cNvSpPr>
-            <a:spLocks noGrp="1"/>
-          </p:cNvSpPr>
-          <p:nvPr>
-            <p:ph type="sldNum" idx="6"/>
-          </p:nvPr>
-        </p:nvSpPr>
-        <p:spPr>
-          <a:xfrm>
-            <a:off x="8490240" y="4681080"/>
-            <a:ext cx="548280" cy="393120"/>
-          </a:xfrm>
-          <a:prstGeom prst="rect">
-            <a:avLst/>
-          </a:prstGeom>
-          <a:noFill/>
-          <a:ln w="0">
-            <a:noFill/>
-          </a:ln>
-        </p:spPr>
-        <p:txBody>
-          <a:bodyPr lIns="91440" rIns="91440" tIns="91440" bIns="91440" anchor="ctr">
-            <a:normAutofit/>
+            <a:noAutofit/>
           </a:bodyPr>
           <a:lstStyle>
             <a:lvl1pPr indent="0" algn="r">
@@ -3007,7 +2637,7 @@
                 <a:tab algn="l" pos="0"/>
               </a:tabLst>
             </a:pPr>
-            <a:fld id="{D386ECDE-F6DD-444E-8678-DAFE07F36E46}" type="slidenum">
+            <a:fld id="{39FC1943-D0D1-40E0-AEED-5EC55AA9F6B2}" type="slidenum">
               <a:rPr b="0" lang="en" sz="1000" spc="-1" strike="noStrike">
                 <a:solidFill>
                   <a:schemeClr val="lt1"/>
@@ -3054,7 +2684,7 @@
       </p:grpSpPr>
       <p:pic>
         <p:nvPicPr>
-          <p:cNvPr id="29" name="Google Shape;37;p8" descr=""/>
+          <p:cNvPr id="25" name="Google Shape;37;p8" descr=""/>
           <p:cNvPicPr/>
           <p:nvPr/>
         </p:nvPicPr>
@@ -3066,7 +2696,7 @@
         <p:spPr>
           <a:xfrm>
             <a:off x="3927600" y="993600"/>
-            <a:ext cx="4802760" cy="2919240"/>
+            <a:ext cx="4802400" cy="2918880"/>
           </a:xfrm>
           <a:prstGeom prst="rect">
             <a:avLst/>
@@ -3078,7 +2708,7 @@
       </p:pic>
       <p:sp>
         <p:nvSpPr>
-          <p:cNvPr id="30" name="PlaceHolder 1"/>
+          <p:cNvPr id="26" name="PlaceHolder 1"/>
           <p:cNvSpPr>
             <a:spLocks noGrp="1"/>
           </p:cNvSpPr>
@@ -3089,7 +2719,7 @@
         <p:spPr>
           <a:xfrm>
             <a:off x="236880" y="531000"/>
-            <a:ext cx="3319560" cy="2636640"/>
+            <a:ext cx="3319200" cy="2636280"/>
           </a:xfrm>
           <a:prstGeom prst="rect">
             <a:avLst/>
@@ -3125,7 +2755,7 @@
             </a:r>
             <a:endParaRPr b="0" lang="en-US" sz="6000" spc="-1" strike="noStrike">
               <a:solidFill>
-                <a:srgbClr val="000000"/>
+                <a:srgbClr val="ffffff"/>
               </a:solidFill>
               <a:latin typeface="Arial"/>
             </a:endParaRPr>
@@ -3152,7 +2782,7 @@
             </a:r>
             <a:endParaRPr b="0" lang="en-US" sz="3600" spc="-1" strike="noStrike">
               <a:solidFill>
-                <a:srgbClr val="000000"/>
+                <a:srgbClr val="ffffff"/>
               </a:solidFill>
               <a:latin typeface="Arial"/>
             </a:endParaRPr>
@@ -3161,14 +2791,14 @@
       </p:sp>
       <p:sp>
         <p:nvSpPr>
-          <p:cNvPr id="31" name="Google Shape;39;p8"/>
+          <p:cNvPr id="27" name="Google Shape;39;p8"/>
           <p:cNvSpPr/>
           <p:nvPr/>
         </p:nvSpPr>
         <p:spPr>
           <a:xfrm>
             <a:off x="0" y="0"/>
-            <a:ext cx="2999520" cy="399960"/>
+            <a:ext cx="2999160" cy="399600"/>
           </a:xfrm>
           <a:prstGeom prst="rect">
             <a:avLst/>
@@ -3185,7 +2815,7 @@
           <a:fontRef idx="minor"/>
         </p:style>
         <p:txBody>
-          <a:bodyPr tIns="91440" bIns="91440" anchor="t">
+          <a:bodyPr lIns="90000" rIns="90000" tIns="91440" bIns="91440" anchor="t">
             <a:spAutoFit/>
           </a:bodyPr>
           <a:p>
@@ -3208,7 +2838,7 @@
       </p:sp>
       <p:sp>
         <p:nvSpPr>
-          <p:cNvPr id="32" name="PlaceHolder 2"/>
+          <p:cNvPr id="28" name="PlaceHolder 2"/>
           <p:cNvSpPr>
             <a:spLocks noGrp="1"/>
           </p:cNvSpPr>
@@ -3219,7 +2849,7 @@
         <p:spPr>
           <a:xfrm>
             <a:off x="6725880" y="4661640"/>
-            <a:ext cx="2418120" cy="481320"/>
+            <a:ext cx="2417760" cy="480960"/>
           </a:xfrm>
           <a:prstGeom prst="rect">
             <a:avLst/>
@@ -3255,7 +2885,7 @@
             </a:r>
             <a:endParaRPr b="0" lang="en-US" sz="2000" spc="-1" strike="noStrike">
               <a:solidFill>
-                <a:srgbClr val="000000"/>
+                <a:srgbClr val="ffffff"/>
               </a:solidFill>
               <a:latin typeface="Arial"/>
             </a:endParaRPr>
@@ -3264,7 +2894,7 @@
       </p:sp>
       <p:pic>
         <p:nvPicPr>
-          <p:cNvPr id="33" name="Google Shape;41;p8" descr=""/>
+          <p:cNvPr id="29" name="Google Shape;41;p8" descr=""/>
           <p:cNvPicPr/>
           <p:nvPr/>
         </p:nvPicPr>
@@ -3276,7 +2906,7 @@
         <p:spPr>
           <a:xfrm>
             <a:off x="1620720" y="531000"/>
-            <a:ext cx="464040" cy="594000"/>
+            <a:ext cx="463680" cy="593640"/>
           </a:xfrm>
           <a:prstGeom prst="rect">
             <a:avLst/>
@@ -3288,7 +2918,7 @@
       </p:pic>
       <p:pic>
         <p:nvPicPr>
-          <p:cNvPr id="34" name="Google Shape;42;p8" descr=""/>
+          <p:cNvPr id="30" name="Google Shape;42;p8" descr=""/>
           <p:cNvPicPr/>
           <p:nvPr/>
         </p:nvPicPr>
@@ -3299,7 +2929,7 @@
         <p:spPr>
           <a:xfrm>
             <a:off x="6613920" y="4788360"/>
-            <a:ext cx="268200" cy="268200"/>
+            <a:ext cx="267840" cy="267840"/>
           </a:xfrm>
           <a:prstGeom prst="rect">
             <a:avLst/>
@@ -3341,7 +2971,7 @@
       </p:grpSpPr>
       <p:sp>
         <p:nvSpPr>
-          <p:cNvPr id="35" name="PlaceHolder 1"/>
+          <p:cNvPr id="31" name="PlaceHolder 1"/>
           <p:cNvSpPr>
             <a:spLocks noGrp="1"/>
           </p:cNvSpPr>
@@ -3352,7 +2982,7 @@
         <p:spPr>
           <a:xfrm>
             <a:off x="921240" y="118800"/>
-            <a:ext cx="8520120" cy="572400"/>
+            <a:ext cx="8519760" cy="572040"/>
           </a:xfrm>
           <a:prstGeom prst="rect">
             <a:avLst/>
@@ -3364,7 +2994,7 @@
         </p:spPr>
         <p:txBody>
           <a:bodyPr lIns="91440" rIns="91440" tIns="91440" bIns="91440" anchor="t">
-            <a:normAutofit fontScale="65255"/>
+            <a:normAutofit fontScale="64999"/>
           </a:bodyPr>
           <a:p>
             <a:pPr indent="0">
@@ -3388,7 +3018,7 @@
             </a:r>
             <a:endParaRPr b="0" lang="en-US" sz="4000" spc="-1" strike="noStrike">
               <a:solidFill>
-                <a:srgbClr val="000000"/>
+                <a:srgbClr val="ffffff"/>
               </a:solidFill>
               <a:latin typeface="Arial"/>
             </a:endParaRPr>
@@ -3397,19 +3027,19 @@
       </p:sp>
       <p:pic>
         <p:nvPicPr>
-          <p:cNvPr id="36" name="Google Shape;48;p9" descr=""/>
+          <p:cNvPr id="32" name="Google Shape;48;p9" descr=""/>
           <p:cNvPicPr/>
           <p:nvPr/>
         </p:nvPicPr>
         <p:blipFill>
           <a:blip r:embed="rId1"/>
-          <a:srcRect l="0" t="0" r="67555" b="0"/>
+          <a:srcRect l="0" t="0" r="67547" b="0"/>
           <a:stretch/>
         </p:blipFill>
         <p:spPr>
           <a:xfrm>
             <a:off x="2750760" y="1207440"/>
-            <a:ext cx="590400" cy="572400"/>
+            <a:ext cx="590040" cy="572040"/>
           </a:xfrm>
           <a:prstGeom prst="rect">
             <a:avLst/>
@@ -3421,14 +3051,14 @@
       </p:pic>
       <p:sp>
         <p:nvSpPr>
-          <p:cNvPr id="37" name="Google Shape;49;p9"/>
+          <p:cNvPr id="33" name="Google Shape;49;p9"/>
           <p:cNvSpPr/>
           <p:nvPr/>
         </p:nvSpPr>
         <p:spPr>
           <a:xfrm>
             <a:off x="344880" y="1334520"/>
-            <a:ext cx="4006440" cy="3840120"/>
+            <a:ext cx="4006080" cy="3840120"/>
           </a:xfrm>
           <a:prstGeom prst="rect">
             <a:avLst/>
@@ -3445,7 +3075,7 @@
           <a:fontRef idx="minor"/>
         </p:style>
         <p:txBody>
-          <a:bodyPr tIns="91440" bIns="91440" anchor="t">
+          <a:bodyPr lIns="90000" rIns="90000" tIns="91440" bIns="91440" anchor="t">
             <a:spAutoFit/>
           </a:bodyPr>
           <a:p>
@@ -3724,21 +3354,21 @@
       </p:sp>
       <p:grpSp>
         <p:nvGrpSpPr>
-          <p:cNvPr id="38" name="Google Shape;50;p9"/>
+          <p:cNvPr id="34" name="Google Shape;50;p9"/>
           <p:cNvGrpSpPr/>
           <p:nvPr/>
         </p:nvGrpSpPr>
         <p:grpSpPr>
           <a:xfrm>
             <a:off x="4467600" y="919440"/>
-            <a:ext cx="4592880" cy="3444480"/>
+            <a:ext cx="4592520" cy="3444120"/>
             <a:chOff x="4467600" y="919440"/>
-            <a:chExt cx="4592880" cy="3444480"/>
+            <a:chExt cx="4592520" cy="3444120"/>
           </a:xfrm>
         </p:grpSpPr>
         <p:pic>
           <p:nvPicPr>
-            <p:cNvPr id="39" name="Google Shape;51;p9" descr=""/>
+            <p:cNvPr id="35" name="Google Shape;51;p9" descr=""/>
             <p:cNvPicPr/>
             <p:nvPr/>
           </p:nvPicPr>
@@ -3749,7 +3379,7 @@
           <p:spPr>
             <a:xfrm>
               <a:off x="4467600" y="919440"/>
-              <a:ext cx="4592880" cy="3444480"/>
+              <a:ext cx="4592520" cy="3444120"/>
             </a:xfrm>
             <a:prstGeom prst="rect">
               <a:avLst/>
@@ -3761,14 +3391,14 @@
         </p:pic>
         <p:sp>
           <p:nvSpPr>
-            <p:cNvPr id="40" name="Google Shape;52;p9"/>
+            <p:cNvPr id="36" name="Google Shape;52;p9"/>
             <p:cNvSpPr/>
             <p:nvPr/>
           </p:nvSpPr>
           <p:spPr>
             <a:xfrm>
               <a:off x="6254640" y="2950560"/>
-              <a:ext cx="1411560" cy="548280"/>
+              <a:ext cx="1411200" cy="548280"/>
             </a:xfrm>
             <a:prstGeom prst="rect">
               <a:avLst/>
@@ -3785,7 +3415,7 @@
             <a:fontRef idx="minor"/>
           </p:style>
           <p:txBody>
-            <a:bodyPr tIns="91440" bIns="91440" anchor="t">
+            <a:bodyPr lIns="90000" rIns="90000" tIns="91440" bIns="91440" anchor="t">
               <a:spAutoFit/>
             </a:bodyPr>
             <a:p>
@@ -3819,7 +3449,7 @@
       </p:grpSp>
       <p:pic>
         <p:nvPicPr>
-          <p:cNvPr id="41" name="Google Shape;53;p9" descr=""/>
+          <p:cNvPr id="37" name="Google Shape;53;p9" descr=""/>
           <p:cNvPicPr/>
           <p:nvPr/>
         </p:nvPicPr>
@@ -3830,7 +3460,7 @@
         <p:spPr>
           <a:xfrm>
             <a:off x="65880" y="64080"/>
-            <a:ext cx="855360" cy="855360"/>
+            <a:ext cx="855000" cy="855000"/>
           </a:xfrm>
           <a:prstGeom prst="rect">
             <a:avLst/>
@@ -3842,7 +3472,7 @@
       </p:pic>
       <p:pic>
         <p:nvPicPr>
-          <p:cNvPr id="42" name="Google Shape;54;p9" descr=""/>
+          <p:cNvPr id="38" name="Google Shape;54;p9" descr=""/>
           <p:cNvPicPr/>
           <p:nvPr/>
         </p:nvPicPr>
@@ -3853,7 +3483,7 @@
         <p:spPr>
           <a:xfrm>
             <a:off x="3461760" y="1207440"/>
-            <a:ext cx="477000" cy="572400"/>
+            <a:ext cx="476640" cy="572040"/>
           </a:xfrm>
           <a:prstGeom prst="rect">
             <a:avLst/>
